--- a/docs/deck-agentium-decision-adoption.fr.pptx
+++ b/docs/deck-agentium-decision-adoption.fr.pptx
@@ -3824,7 +3824,7 @@
                 </a:solidFill>
                 <a:latin typeface="Consolas"/>
               </a:rPr>
-              <a:t>Portefeuille                 System                      Application</a:t>
+              <a:t>Portefeuille                 Un System                   L’application</a:t>
             </a:r>
           </a:p>
           <a:p>
@@ -3843,7 +3843,7 @@
                 </a:solidFill>
                 <a:latin typeface="Consolas"/>
               </a:rPr>
-              <a:t>/hypervisor                  Steer                       Studio</a:t>
+              <a:t>Hyperviseur / Impact         Pilotage (Steer)            Studio</a:t>
             </a:r>
           </a:p>
           <a:p>
@@ -3862,7 +3862,7 @@
                 </a:solidFill>
                 <a:latin typeface="Consolas"/>
               </a:rPr>
-              <a:t>accept / reject              Simuler → Approuver         gate humain</a:t>
+              <a:t>accepter / refuser           Simuler → Approuver         approbation humaine</a:t>
             </a:r>
           </a:p>
           <a:p>
@@ -3881,7 +3881,7 @@
                 </a:solidFill>
                 <a:latin typeface="Consolas"/>
               </a:rPr>
-              <a:t>signal                       → Agir → Mesurer            approbation</a:t>
+              <a:t>= un avis                    → Appliquer → Mesurer       obligatoire</a:t>
             </a:r>
           </a:p>
           <a:p>
@@ -3900,7 +3900,7 @@
                 </a:solidFill>
                 <a:latin typeface="Consolas"/>
               </a:rPr>
-              <a:t>                             enactment borné             requise</a:t>
+              <a:t>                             changement borné</a:t>
             </a:r>
           </a:p>
         </p:txBody>
@@ -3937,25 +3937,7 @@
                 </a:solidFill>
                 <a:latin typeface="Calibri"/>
               </a:rPr>
-              <a:t>Premier actionneur : un patch de </a:t>
-            </a:r>
-            <a:r>
-              <a:rPr sz="1600" b="0" i="1">
-                <a:solidFill>
-                  <a:srgbClr val="151A23"/>
-                </a:solidFill>
-                <a:latin typeface="Calibri"/>
-              </a:rPr>
-              <a:t>guardrails</a:t>
-            </a:r>
-            <a:r>
-              <a:rPr sz="1600" b="0" i="0">
-                <a:solidFill>
-                  <a:srgbClr val="151A23"/>
-                </a:solidFill>
-                <a:latin typeface="Calibri"/>
-              </a:rPr>
-              <a:t>, si le System le déclare et si la Membrane l’autorise. Sinon : </a:t>
+              <a:t>Premier changement autorisé : un ajustement de garde-fous, si le System le déclare et si le contrôle d’exécution l’autorise. Sinon : </a:t>
             </a:r>
             <a:r>
               <a:rPr sz="1600" b="1" i="0">
@@ -4352,7 +4334,7 @@
                 </a:solidFill>
                 <a:latin typeface="Calibri"/>
               </a:rPr>
-              <a:t>•  L’Hyperviseur n’applique pas tout seul une policy.</a:t>
+              <a:t>•  L’Hyperviseur n’applique pas tout seul une règle.</a:t>
             </a:r>
           </a:p>
         </p:txBody>
@@ -4384,7 +4366,7 @@
                 </a:solidFill>
                 <a:latin typeface="Calibri"/>
               </a:rPr>
-              <a:t>•  Le what-if portefeuille / leviers live est </a:t>
+              <a:t>•  Le « et si » / leviers en direct sur tout le portefeuille est </a:t>
             </a:r>
             <a:r>
               <a:rPr sz="1600" b="1" i="0">
@@ -4434,25 +4416,7 @@
                 </a:solidFill>
                 <a:latin typeface="Calibri"/>
               </a:rPr>
-              <a:t>•  Mission Room (</a:t>
-            </a:r>
-            <a:r>
-              <a:rPr sz="1600" b="0" i="0">
-                <a:solidFill>
-                  <a:srgbClr val="0E6B6A"/>
-                </a:solidFill>
-                <a:latin typeface="Consolas"/>
-              </a:rPr>
-              <a:t>/hypervisor/mission-room</a:t>
-            </a:r>
-            <a:r>
-              <a:rPr sz="1600" b="0" i="0">
-                <a:solidFill>
-                  <a:srgbClr val="151A23"/>
-                </a:solidFill>
-                <a:latin typeface="Calibri"/>
-              </a:rPr>
-              <a:t>) est une </a:t>
+              <a:t>•  Mission Room est une </a:t>
             </a:r>
             <a:r>
               <a:rPr sz="1600" b="1" i="0">
@@ -4461,7 +4425,7 @@
                 </a:solidFill>
                 <a:latin typeface="Calibri"/>
               </a:rPr>
-              <a:t>app de workspace</a:t>
+              <a:t>application d’espace</a:t>
             </a:r>
             <a:r>
               <a:rPr sz="1600" b="0" i="0">
@@ -4534,7 +4498,7 @@
                 </a:solidFill>
                 <a:latin typeface="Calibri"/>
               </a:rPr>
-              <a:t>•  « Heures ou euros économisés » sans baseline Lot 8 = trou d’acceptation (O5).</a:t>
+              <a:t>•  « Heures ou euros économisés » sans mesure après changement = un trou, pas un KPI.</a:t>
             </a:r>
           </a:p>
         </p:txBody>
@@ -4928,7 +4892,7 @@
                 </a:solidFill>
                 <a:latin typeface="Consolas"/>
               </a:rPr>
-              <a:t>1. Finir une tâche              Work / Studio</a:t>
+              <a:t>1. Finir une tâche                    Work / Studio</a:t>
             </a:r>
           </a:p>
           <a:p>
@@ -4947,7 +4911,7 @@
                 </a:solidFill>
                 <a:latin typeface="Consolas"/>
               </a:rPr>
-              <a:t>2. Relier le résultat à un Run  Citation · /runs · compagnon</a:t>
+              <a:t>2. Relier le résultat à une exécution Source ouverte · compagnon</a:t>
             </a:r>
           </a:p>
           <a:p>
@@ -4966,7 +4930,7 @@
                 </a:solidFill>
                 <a:latin typeface="Consolas"/>
               </a:rPr>
-              <a:t>3. Relier le Run à une décision Impact · gates · Steer</a:t>
+              <a:t>3. Relier l’exécution à une décision  Impact · approbation · Steer</a:t>
             </a:r>
           </a:p>
         </p:txBody>
@@ -5092,7 +5056,7 @@
                           </a:solidFill>
                           <a:latin typeface="Calibri"/>
                         </a:rPr>
-                        <a:t>IAM</a:t>
+                        <a:t>Droits d’accès</a:t>
                       </a:r>
                     </a:p>
                   </a:txBody>
@@ -5140,7 +5104,7 @@
                           </a:solidFill>
                           <a:latin typeface="Calibri"/>
                         </a:rPr>
-                        <a:t>Mode workspace</a:t>
+                        <a:t>Mode de l’espace</a:t>
                       </a:r>
                     </a:p>
                   </a:txBody>
@@ -5163,7 +5127,7 @@
                           </a:solidFill>
                           <a:latin typeface="Calibri"/>
                         </a:rPr>
-                        <a:t>Densité de l’écran (builder / operator / executive)</a:t>
+                        <a:t>Densité de l’écran (construire / opérer / diriger)</a:t>
                       </a:r>
                     </a:p>
                   </a:txBody>
@@ -5740,7 +5704,7 @@
                 </a:solidFill>
                 <a:latin typeface="Calibri"/>
               </a:rPr>
-              <a:t>`/help/value`</a:t>
+              <a:t>Aide valeur</a:t>
             </a:r>
             <a:r>
               <a:rPr sz="1600" b="0" i="0">
@@ -6177,13 +6141,13 @@
               <a:t>1.  </a:t>
             </a:r>
             <a:r>
-              <a:rPr sz="1600" b="0" i="0">
-                <a:solidFill>
-                  <a:srgbClr val="0E6B6A"/>
-                </a:solidFill>
-                <a:latin typeface="Consolas"/>
-              </a:rPr>
-              <a:t>/work</a:t>
+              <a:rPr sz="1600" b="1" i="0">
+                <a:solidFill>
+                  <a:srgbClr val="151A23"/>
+                </a:solidFill>
+                <a:latin typeface="Calibri"/>
+              </a:rPr>
+              <a:t>Work</a:t>
             </a:r>
             <a:r>
               <a:rPr sz="1600" b="0" i="0">
@@ -6233,7 +6197,7 @@
                 </a:solidFill>
                 <a:latin typeface="Calibri"/>
               </a:rPr>
-              <a:t>Ouvrir la citation.</a:t>
+              <a:t>Ouvrir la source.</a:t>
             </a:r>
           </a:p>
         </p:txBody>
@@ -6265,25 +6229,7 @@
                 </a:solidFill>
                 <a:latin typeface="Calibri"/>
               </a:rPr>
-              <a:t>3.  (Optionnel) NorthForge : </a:t>
-            </a:r>
-            <a:r>
-              <a:rPr sz="1600" b="0" i="0">
-                <a:solidFill>
-                  <a:srgbClr val="0E6B6A"/>
-                </a:solidFill>
-                <a:latin typeface="Consolas"/>
-              </a:rPr>
-              <a:t>/work/getting-started</a:t>
-            </a:r>
-            <a:r>
-              <a:rPr sz="1600" b="0" i="0">
-                <a:solidFill>
-                  <a:srgbClr val="151A23"/>
-                </a:solidFill>
-                <a:latin typeface="Calibri"/>
-              </a:rPr>
-              <a:t> — quatre étapes, exemple fictif.</a:t>
+              <a:t>3.  (Optionnel) Exemple guidé — quatre étapes, cas fictif.</a:t>
             </a:r>
           </a:p>
         </p:txBody>
@@ -6315,7 +6261,7 @@
                 </a:solidFill>
                 <a:latin typeface="Calibri"/>
               </a:rPr>
-              <a:t>4.  Si un gate apparaît : </a:t>
+              <a:t>4.  Si une approbation apparaît : </a:t>
             </a:r>
             <a:r>
               <a:rPr sz="1600" b="1" i="0">
@@ -6767,7 +6713,7 @@
                 </a:solidFill>
                 <a:latin typeface="Calibri"/>
               </a:rPr>
-              <a:t>1.  Un gate </a:t>
+              <a:t>1.  Une approbation </a:t>
             </a:r>
             <a:r>
               <a:rPr sz="1600" b="1" i="0">
@@ -6817,7 +6763,7 @@
                 </a:solidFill>
                 <a:latin typeface="Calibri"/>
               </a:rPr>
-              <a:t>2.  Le feed </a:t>
+              <a:t>2.  La file </a:t>
             </a:r>
             <a:r>
               <a:rPr sz="1600" b="1" i="0">
@@ -6835,7 +6781,7 @@
                 </a:solidFill>
                 <a:latin typeface="Calibri"/>
               </a:rPr>
-              <a:t> — signal, pas enactment.</a:t>
+              <a:t> — un avis, pas une application.</a:t>
             </a:r>
           </a:p>
         </p:txBody>
@@ -6867,7 +6813,7 @@
                 </a:solidFill>
                 <a:latin typeface="Calibri"/>
               </a:rPr>
-              <a:t>3.  Si — et seulement si — la boucle de valeur est active sur </a:t>
+              <a:t>3.  Si — et seulement si — la boucle de valeur est ouverte sur </a:t>
             </a:r>
             <a:r>
               <a:rPr sz="1600" b="1" i="0">
@@ -6922,7 +6868,7 @@
                 </a:solidFill>
                 <a:latin typeface="Calibri"/>
               </a:rPr>
-              <a:t>Simuler → Approuver → Agir → Mesurer</a:t>
+              <a:t>Simuler → Approuver → Appliquer → Mesurer</a:t>
             </a:r>
             <a:r>
               <a:rPr sz="1600" b="0" i="0">
@@ -6968,7 +6914,7 @@
                 </a:solidFill>
                 <a:latin typeface="Calibri"/>
               </a:rPr>
-              <a:t>Le modèle ne peut pas accepter un gate. Une décision périmée est refusée.</a:t>
+              <a:t>Le modèle ne peut pas accepter à votre place. Une décision trop vieille est refusée.</a:t>
             </a:r>
           </a:p>
         </p:txBody>
@@ -7436,7 +7382,7 @@
                           </a:solidFill>
                           <a:latin typeface="Calibri"/>
                         </a:rPr>
-                        <a:t>Livré, flag adoption_experience_v1 off</a:t>
+                        <a:t>Livré, parcours d’accueil éteint par défaut</a:t>
                       </a:r>
                     </a:p>
                   </a:txBody>
@@ -8288,7 +8234,7 @@
                           </a:solidFill>
                           <a:latin typeface="Calibri"/>
                         </a:rPr>
-                        <a:t>Mehdi steward</a:t>
+                        <a:t>Mehdi pilote</a:t>
                       </a:r>
                     </a:p>
                   </a:txBody>
@@ -9060,7 +9006,7 @@
                 </a:solidFill>
                 <a:latin typeface="Calibri"/>
               </a:rPr>
-              <a:t> — seulement si le flag valeur est vraiment on. Sinon, le dire.</a:t>
+              <a:t> — seulement si la boucle de valeur est vraiment ouverte. Sinon, le dire.</a:t>
             </a:r>
           </a:p>
         </p:txBody>
@@ -9101,7 +9047,7 @@
                 </a:solidFill>
                 <a:latin typeface="Calibri"/>
               </a:rPr>
-              <a:t>`/help/value`</a:t>
+              <a:t>Aide valeur</a:t>
             </a:r>
             <a:r>
               <a:rPr sz="1600" b="0" i="0">
@@ -12635,7 +12581,7 @@
                           </a:solidFill>
                           <a:latin typeface="Calibri"/>
                         </a:rPr>
-                        <a:t>/hypervisor</a:t>
+                        <a:t>Hyperviseur / Impact</a:t>
                       </a:r>
                     </a:p>
                   </a:txBody>
@@ -12706,7 +12652,7 @@
                           </a:solidFill>
                           <a:latin typeface="Calibri"/>
                         </a:rPr>
-                        <a:t>/work · Studio</a:t>
+                        <a:t>Work · Studio</a:t>
                       </a:r>
                     </a:p>
                   </a:txBody>
@@ -12777,7 +12723,7 @@
                           </a:solidFill>
                           <a:latin typeface="Calibri"/>
                         </a:rPr>
-                        <a:t>/runs · file de revue · Diagnostics</a:t>
+                        <a:t>Exécutions · file de revue · Diagnostics</a:t>
                       </a:r>
                     </a:p>
                   </a:txBody>
@@ -12848,7 +12794,7 @@
                           </a:solidFill>
                           <a:latin typeface="Calibri"/>
                         </a:rPr>
-                        <a:t>Feed Impact · gates Work · Steer</a:t>
+                        <a:t>File Impact · approbation dans l’app · Steer</a:t>
                       </a:r>
                     </a:p>
                   </a:txBody>
@@ -13218,7 +13164,7 @@
                 </a:solidFill>
                 <a:latin typeface="Calibri"/>
               </a:rPr>
-              <a:t> — un System sert une Capability, pas un prompt orphelin.</a:t>
+              <a:t> — un System sert une capacité métier, pas un prompt orphelin.</a:t>
             </a:r>
           </a:p>
         </p:txBody>
@@ -13268,7 +13214,7 @@
                 </a:solidFill>
                 <a:latin typeface="Calibri"/>
               </a:rPr>
-              <a:t> — le métier consomme une Experience </a:t>
+              <a:t> — le métier utilise une application </a:t>
             </a:r>
             <a:r>
               <a:rPr sz="1600" b="1" i="0">
@@ -13336,7 +13282,7 @@
                 </a:solidFill>
                 <a:latin typeface="Calibri"/>
               </a:rPr>
-              <a:t> — chaque réponse a un Run (coût, contexte, lignée).</a:t>
+              <a:t> — chaque réponse a une exécution (coût, contexte, lignée).</a:t>
             </a:r>
           </a:p>
         </p:txBody>
@@ -13386,7 +13332,7 @@
                 </a:solidFill>
                 <a:latin typeface="Calibri"/>
               </a:rPr>
-              <a:t> — politiques, IAM, audit. Jamais « prompt only ».</a:t>
+              <a:t> — règles, droits d’accès, journal. Jamais « prompt only ».</a:t>
             </a:r>
           </a:p>
         </p:txBody>
@@ -14050,43 +13996,25 @@
                 </a:solidFill>
                 <a:latin typeface="Calibri"/>
               </a:rPr>
-              <a:t>Route : </a:t>
+              <a:t>Le menu peut dire </a:t>
+            </a:r>
+            <a:r>
+              <a:rPr sz="1600" b="1" i="0">
+                <a:solidFill>
+                  <a:srgbClr val="151A23"/>
+                </a:solidFill>
+                <a:latin typeface="Calibri"/>
+              </a:rPr>
+              <a:t>Impact</a:t>
             </a:r>
             <a:r>
               <a:rPr sz="1600" b="0" i="0">
                 <a:solidFill>
-                  <a:srgbClr val="0E6B6A"/>
-                </a:solidFill>
-                <a:latin typeface="Consolas"/>
-              </a:rPr>
-              <a:t>/hypervisor</a:t>
-            </a:r>
-            <a:r>
-              <a:rPr sz="1600" b="0" i="0">
-                <a:solidFill>
-                  <a:srgbClr val="151A23"/>
-                </a:solidFill>
-                <a:latin typeface="Calibri"/>
-              </a:rPr>
-              <a:t> Rail adoption : </a:t>
-            </a:r>
-            <a:r>
-              <a:rPr sz="1600" b="1" i="0">
-                <a:solidFill>
-                  <a:srgbClr val="151A23"/>
-                </a:solidFill>
-                <a:latin typeface="Calibri"/>
-              </a:rPr>
-              <a:t>Impact</a:t>
-            </a:r>
-            <a:r>
-              <a:rPr sz="1600" b="0" i="0">
-                <a:solidFill>
-                  <a:srgbClr val="151A23"/>
-                </a:solidFill>
-                <a:latin typeface="Calibri"/>
-              </a:rPr>
-              <a:t> — le nom n’établit pas l’outcome.</a:t>
+                  <a:srgbClr val="151A23"/>
+                </a:solidFill>
+                <a:latin typeface="Calibri"/>
+              </a:rPr>
+              <a:t> — le nom n’établit pas un résultat économique.</a:t>
             </a:r>
           </a:p>
         </p:txBody>
@@ -14272,7 +14200,7 @@
                 </a:solidFill>
                 <a:latin typeface="Calibri"/>
               </a:rPr>
-              <a:t>Deux lectures, un même objet Decision</a:t>
+              <a:t>Deux lectures, un même avis à signer</a:t>
             </a:r>
           </a:p>
         </p:txBody>
@@ -14442,7 +14370,7 @@
                 </a:solidFill>
                 <a:latin typeface="Calibri"/>
               </a:rPr>
-              <a:t>Accepter / Rejeter = signal</a:t>
+              <a:t>Accepter / Refuser = un avis</a:t>
             </a:r>
             <a:r>
               <a:rPr sz="1600" b="0" i="0">
@@ -14460,7 +14388,7 @@
                 </a:solidFill>
                 <a:latin typeface="Calibri"/>
               </a:rPr>
-              <a:t>Appliquer une policy</a:t>
+              <a:t>Appliquer un changement de règle</a:t>
             </a:r>
             <a:r>
               <a:rPr sz="1600" b="0" i="0">
@@ -14553,7 +14481,7 @@
                 </a:solidFill>
                 <a:latin typeface="Calibri"/>
               </a:rPr>
-              <a:t>« Valider ici enregistre une décision. Modifier un System passe par Steer. »</a:t>
+              <a:t>« Valider ici enregistre un avis. Modifier un System passe par son écran de pilotage. »</a:t>
             </a:r>
           </a:p>
         </p:txBody>
@@ -14594,7 +14522,7 @@
                           </a:solidFill>
                           <a:latin typeface="Calibri"/>
                         </a:rPr>
-                        <a:t>v1 Bilan de valeur</a:t>
+                        <a:t>Ancienne vue — Bilan de valeur</a:t>
                       </a:r>
                     </a:p>
                   </a:txBody>
@@ -14617,7 +14545,7 @@
                           </a:solidFill>
                           <a:latin typeface="Calibri"/>
                         </a:rPr>
-                        <a:t>v2 Grand Livre (hypervisor_v2)</a:t>
+                        <a:t>Nouvelle vue — Grand livre</a:t>
                       </a:r>
                     </a:p>
                   </a:txBody>
@@ -14642,7 +14570,7 @@
                           </a:solidFill>
                           <a:latin typeface="Calibri"/>
                         </a:rPr>
-                        <a:t>Valeur nette estimée, ROI, SCAN</a:t>
+                        <a:t>Valeur nette estimée, ROI, signaux</a:t>
                       </a:r>
                     </a:p>
                   </a:txBody>
@@ -14690,7 +14618,7 @@
                           </a:solidFill>
                           <a:latin typeface="Calibri"/>
                         </a:rPr>
-                        <a:t>+ agrégat de boucle de valeur</a:t>
+                        <a:t>+ résumé de boucle de valeur</a:t>
                       </a:r>
                     </a:p>
                   </a:txBody>
@@ -14761,7 +14689,7 @@
                           </a:solidFill>
                           <a:latin typeface="Calibri"/>
                         </a:rPr>
-                        <a:t>Direction · Operations · Conformité</a:t>
+                        <a:t>Direction · Opérations · Conformité</a:t>
                       </a:r>
                     </a:p>
                   </a:txBody>
